--- a/docs/pptx/auc3/ritu-auc3-adjcif-grade3.pptx
+++ b/docs/pptx/auc3/ritu-auc3-adjcif-grade3.pptx
@@ -2271,7 +2271,7 @@
           </p:nvSpPr>
           <p:spPr>
             <a:xfrm>
-              <a:off x="972874" y="5287713"/>
+              <a:off x="972874" y="5292202"/>
               <a:ext cx="7644336" cy="0"/>
             </a:xfrm>
             <a:custGeom>
@@ -2314,7 +2314,7 @@
           </p:nvSpPr>
           <p:spPr>
             <a:xfrm>
-              <a:off x="972874" y="4702296"/>
+              <a:off x="972874" y="4715761"/>
               <a:ext cx="7644336" cy="0"/>
             </a:xfrm>
             <a:custGeom>
@@ -2357,7 +2357,7 @@
           </p:nvSpPr>
           <p:spPr>
             <a:xfrm>
-              <a:off x="972874" y="4116879"/>
+              <a:off x="972874" y="4139321"/>
               <a:ext cx="7644336" cy="0"/>
             </a:xfrm>
             <a:custGeom>
@@ -2400,7 +2400,7 @@
           </p:nvSpPr>
           <p:spPr>
             <a:xfrm>
-              <a:off x="972874" y="3531462"/>
+              <a:off x="972874" y="3562881"/>
               <a:ext cx="7644336" cy="0"/>
             </a:xfrm>
             <a:custGeom>
@@ -2443,7 +2443,7 @@
           </p:nvSpPr>
           <p:spPr>
             <a:xfrm>
-              <a:off x="972874" y="2946045"/>
+              <a:off x="972874" y="2986440"/>
               <a:ext cx="7644336" cy="0"/>
             </a:xfrm>
             <a:custGeom>
@@ -2701,7 +2701,7 @@
           </p:nvSpPr>
           <p:spPr>
             <a:xfrm>
-              <a:off x="972874" y="4995005"/>
+              <a:off x="972874" y="5003981"/>
               <a:ext cx="7644336" cy="0"/>
             </a:xfrm>
             <a:custGeom>
@@ -2744,7 +2744,7 @@
           </p:nvSpPr>
           <p:spPr>
             <a:xfrm>
-              <a:off x="972874" y="4409588"/>
+              <a:off x="972874" y="4427541"/>
               <a:ext cx="7644336" cy="0"/>
             </a:xfrm>
             <a:custGeom>
@@ -2787,7 +2787,7 @@
           </p:nvSpPr>
           <p:spPr>
             <a:xfrm>
-              <a:off x="972874" y="3824170"/>
+              <a:off x="972874" y="3851101"/>
               <a:ext cx="7644336" cy="0"/>
             </a:xfrm>
             <a:custGeom>
@@ -2830,7 +2830,7 @@
           </p:nvSpPr>
           <p:spPr>
             <a:xfrm>
-              <a:off x="972874" y="3238753"/>
+              <a:off x="972874" y="3274661"/>
               <a:ext cx="7644336" cy="0"/>
             </a:xfrm>
             <a:custGeom>
@@ -2873,7 +2873,7 @@
           </p:nvSpPr>
           <p:spPr>
             <a:xfrm>
-              <a:off x="972874" y="2653336"/>
+              <a:off x="972874" y="2698220"/>
               <a:ext cx="7644336" cy="0"/>
             </a:xfrm>
             <a:custGeom>
@@ -3045,78 +3045,78 @@
           </p:nvSpPr>
           <p:spPr>
             <a:xfrm>
-              <a:off x="1320344" y="5206327"/>
-              <a:ext cx="6949396" cy="358518"/>
+              <a:off x="1320344" y="5202455"/>
+              <a:ext cx="6949396" cy="362786"/>
             </a:xfrm>
             <a:custGeom>
               <a:avLst/>
               <a:pathLst>
-                <a:path w="6949396" h="358518">
+                <a:path w="6949396" h="362786">
                   <a:moveTo>
-                    <a:pt x="0" y="358518"/>
+                    <a:pt x="0" y="362786"/>
                   </a:moveTo>
                   <a:lnTo>
-                    <a:pt x="92658" y="358518"/>
-                  </a:lnTo>
-                  <a:lnTo>
-                    <a:pt x="92658" y="339855"/>
-                  </a:lnTo>
-                  <a:lnTo>
-                    <a:pt x="370634" y="339855"/>
-                  </a:lnTo>
-                  <a:lnTo>
-                    <a:pt x="370634" y="321406"/>
-                  </a:lnTo>
-                  <a:lnTo>
-                    <a:pt x="1482537" y="321406"/>
-                  </a:lnTo>
-                  <a:lnTo>
-                    <a:pt x="1482537" y="302627"/>
-                  </a:lnTo>
-                  <a:lnTo>
-                    <a:pt x="1667855" y="302627"/>
-                  </a:lnTo>
-                  <a:lnTo>
-                    <a:pt x="1667855" y="280109"/>
-                  </a:lnTo>
-                  <a:lnTo>
-                    <a:pt x="3706344" y="280109"/>
-                  </a:lnTo>
-                  <a:lnTo>
-                    <a:pt x="3706344" y="252727"/>
-                  </a:lnTo>
-                  <a:lnTo>
-                    <a:pt x="3799003" y="252727"/>
-                  </a:lnTo>
-                  <a:lnTo>
-                    <a:pt x="3799003" y="192670"/>
-                  </a:lnTo>
-                  <a:lnTo>
-                    <a:pt x="4540272" y="192670"/>
-                  </a:lnTo>
-                  <a:lnTo>
-                    <a:pt x="4540272" y="161999"/>
-                  </a:lnTo>
-                  <a:lnTo>
-                    <a:pt x="5559517" y="161999"/>
-                  </a:lnTo>
-                  <a:lnTo>
-                    <a:pt x="5559517" y="131893"/>
-                  </a:lnTo>
-                  <a:lnTo>
-                    <a:pt x="6115469" y="131893"/>
-                  </a:lnTo>
-                  <a:lnTo>
-                    <a:pt x="6115469" y="102398"/>
-                  </a:lnTo>
-                  <a:lnTo>
-                    <a:pt x="6393445" y="102398"/>
-                  </a:lnTo>
-                  <a:lnTo>
-                    <a:pt x="6393445" y="36021"/>
-                  </a:lnTo>
-                  <a:lnTo>
-                    <a:pt x="6949396" y="36021"/>
+                    <a:pt x="92658" y="362786"/>
+                  </a:lnTo>
+                  <a:lnTo>
+                    <a:pt x="92658" y="344351"/>
+                  </a:lnTo>
+                  <a:lnTo>
+                    <a:pt x="370634" y="344351"/>
+                  </a:lnTo>
+                  <a:lnTo>
+                    <a:pt x="370634" y="326108"/>
+                  </a:lnTo>
+                  <a:lnTo>
+                    <a:pt x="1482537" y="326108"/>
+                  </a:lnTo>
+                  <a:lnTo>
+                    <a:pt x="1482537" y="307544"/>
+                  </a:lnTo>
+                  <a:lnTo>
+                    <a:pt x="1667855" y="307544"/>
+                  </a:lnTo>
+                  <a:lnTo>
+                    <a:pt x="1667855" y="285122"/>
+                  </a:lnTo>
+                  <a:lnTo>
+                    <a:pt x="3706344" y="285122"/>
+                  </a:lnTo>
+                  <a:lnTo>
+                    <a:pt x="3706344" y="257469"/>
+                  </a:lnTo>
+                  <a:lnTo>
+                    <a:pt x="3799003" y="257469"/>
+                  </a:lnTo>
+                  <a:lnTo>
+                    <a:pt x="3799003" y="196477"/>
+                  </a:lnTo>
+                  <a:lnTo>
+                    <a:pt x="4540272" y="196477"/>
+                  </a:lnTo>
+                  <a:lnTo>
+                    <a:pt x="4540272" y="165231"/>
+                  </a:lnTo>
+                  <a:lnTo>
+                    <a:pt x="5559517" y="165231"/>
+                  </a:lnTo>
+                  <a:lnTo>
+                    <a:pt x="5559517" y="134553"/>
+                  </a:lnTo>
+                  <a:lnTo>
+                    <a:pt x="6115469" y="134553"/>
+                  </a:lnTo>
+                  <a:lnTo>
+                    <a:pt x="6115469" y="104483"/>
+                  </a:lnTo>
+                  <a:lnTo>
+                    <a:pt x="6393445" y="104483"/>
+                  </a:lnTo>
+                  <a:lnTo>
+                    <a:pt x="6393445" y="36623"/>
+                  </a:lnTo>
+                  <a:lnTo>
+                    <a:pt x="6949396" y="36623"/>
                   </a:lnTo>
                   <a:lnTo>
                     <a:pt x="6949396" y="0"/>
@@ -3149,77 +3149,77 @@
           <p:spPr>
             <a:xfrm>
               <a:off x="1320344" y="2861938"/>
-              <a:ext cx="6949396" cy="2505124"/>
+              <a:ext cx="6949396" cy="2511784"/>
             </a:xfrm>
             <a:custGeom>
               <a:avLst/>
               <a:pathLst>
-                <a:path w="6949396" h="2505124">
+                <a:path w="6949396" h="2511784">
                   <a:moveTo>
-                    <a:pt x="0" y="2505124"/>
+                    <a:pt x="0" y="2511784"/>
                   </a:moveTo>
                   <a:lnTo>
-                    <a:pt x="92658" y="2505124"/>
-                  </a:lnTo>
-                  <a:lnTo>
-                    <a:pt x="92658" y="2283086"/>
-                  </a:lnTo>
-                  <a:lnTo>
-                    <a:pt x="370634" y="2283086"/>
-                  </a:lnTo>
-                  <a:lnTo>
-                    <a:pt x="370634" y="2089683"/>
-                  </a:lnTo>
-                  <a:lnTo>
-                    <a:pt x="1482537" y="2089683"/>
-                  </a:lnTo>
-                  <a:lnTo>
-                    <a:pt x="1482537" y="1912199"/>
-                  </a:lnTo>
-                  <a:lnTo>
-                    <a:pt x="1667855" y="1912199"/>
-                  </a:lnTo>
-                  <a:lnTo>
-                    <a:pt x="1667855" y="1718331"/>
-                  </a:lnTo>
-                  <a:lnTo>
-                    <a:pt x="3706344" y="1718331"/>
-                  </a:lnTo>
-                  <a:lnTo>
-                    <a:pt x="3706344" y="1503023"/>
-                  </a:lnTo>
-                  <a:lnTo>
-                    <a:pt x="3799003" y="1503023"/>
-                  </a:lnTo>
-                  <a:lnTo>
-                    <a:pt x="3799003" y="1083715"/>
-                  </a:lnTo>
-                  <a:lnTo>
-                    <a:pt x="4540272" y="1083715"/>
-                  </a:lnTo>
-                  <a:lnTo>
-                    <a:pt x="4540272" y="889432"/>
-                  </a:lnTo>
-                  <a:lnTo>
-                    <a:pt x="5559517" y="889432"/>
-                  </a:lnTo>
-                  <a:lnTo>
-                    <a:pt x="5559517" y="708552"/>
-                  </a:lnTo>
-                  <a:lnTo>
-                    <a:pt x="6115469" y="708552"/>
-                  </a:lnTo>
-                  <a:lnTo>
-                    <a:pt x="6115469" y="539317"/>
-                  </a:lnTo>
-                  <a:lnTo>
-                    <a:pt x="6393445" y="539317"/>
-                  </a:lnTo>
-                  <a:lnTo>
-                    <a:pt x="6393445" y="182236"/>
-                  </a:lnTo>
-                  <a:lnTo>
-                    <a:pt x="6949396" y="182236"/>
+                    <a:pt x="92658" y="2511784"/>
+                  </a:lnTo>
+                  <a:lnTo>
+                    <a:pt x="92658" y="2291904"/>
+                  </a:lnTo>
+                  <a:lnTo>
+                    <a:pt x="370634" y="2291904"/>
+                  </a:lnTo>
+                  <a:lnTo>
+                    <a:pt x="370634" y="2099534"/>
+                  </a:lnTo>
+                  <a:lnTo>
+                    <a:pt x="1482537" y="2099534"/>
+                  </a:lnTo>
+                  <a:lnTo>
+                    <a:pt x="1482537" y="1923015"/>
+                  </a:lnTo>
+                  <a:lnTo>
+                    <a:pt x="1667855" y="1923015"/>
+                  </a:lnTo>
+                  <a:lnTo>
+                    <a:pt x="1667855" y="1729254"/>
+                  </a:lnTo>
+                  <a:lnTo>
+                    <a:pt x="3706344" y="1729254"/>
+                  </a:lnTo>
+                  <a:lnTo>
+                    <a:pt x="3706344" y="1511966"/>
+                  </a:lnTo>
+                  <a:lnTo>
+                    <a:pt x="3799003" y="1511966"/>
+                  </a:lnTo>
+                  <a:lnTo>
+                    <a:pt x="3799003" y="1089398"/>
+                  </a:lnTo>
+                  <a:lnTo>
+                    <a:pt x="4540272" y="1089398"/>
+                  </a:lnTo>
+                  <a:lnTo>
+                    <a:pt x="4540272" y="893887"/>
+                  </a:lnTo>
+                  <a:lnTo>
+                    <a:pt x="5559517" y="893887"/>
+                  </a:lnTo>
+                  <a:lnTo>
+                    <a:pt x="5559517" y="712087"/>
+                  </a:lnTo>
+                  <a:lnTo>
+                    <a:pt x="6115469" y="712087"/>
+                  </a:lnTo>
+                  <a:lnTo>
+                    <a:pt x="6115469" y="542049"/>
+                  </a:lnTo>
+                  <a:lnTo>
+                    <a:pt x="6393445" y="542049"/>
+                  </a:lnTo>
+                  <a:lnTo>
+                    <a:pt x="6393445" y="182469"/>
+                  </a:lnTo>
+                  <a:lnTo>
+                    <a:pt x="6949396" y="182469"/>
                   </a:lnTo>
                   <a:lnTo>
                     <a:pt x="6949396" y="0"/>
@@ -3297,7 +3297,7 @@
           </p:nvSpPr>
           <p:spPr>
             <a:xfrm>
-              <a:off x="692708" y="4954954"/>
+              <a:off x="692708" y="4963931"/>
               <a:ext cx="217535" cy="80101"/>
             </a:xfrm>
             <a:prstGeom prst="rect">
@@ -3343,7 +3343,7 @@
           </p:nvSpPr>
           <p:spPr>
             <a:xfrm>
-              <a:off x="692708" y="4369537"/>
+              <a:off x="692708" y="4387490"/>
               <a:ext cx="217535" cy="80101"/>
             </a:xfrm>
             <a:prstGeom prst="rect">
@@ -3389,7 +3389,7 @@
           </p:nvSpPr>
           <p:spPr>
             <a:xfrm>
-              <a:off x="692708" y="3784120"/>
+              <a:off x="692708" y="3811050"/>
               <a:ext cx="217535" cy="80101"/>
             </a:xfrm>
             <a:prstGeom prst="rect">
@@ -3435,7 +3435,7 @@
           </p:nvSpPr>
           <p:spPr>
             <a:xfrm>
-              <a:off x="692708" y="3198703"/>
+              <a:off x="692708" y="3234610"/>
               <a:ext cx="217535" cy="80101"/>
             </a:xfrm>
             <a:prstGeom prst="rect">
@@ -3481,7 +3481,7 @@
           </p:nvSpPr>
           <p:spPr>
             <a:xfrm>
-              <a:off x="692708" y="2613285"/>
+              <a:off x="692708" y="2658170"/>
               <a:ext cx="217535" cy="80101"/>
             </a:xfrm>
             <a:prstGeom prst="rect">
@@ -3962,7 +3962,7 @@
                   <a:latin typeface="Helvetica"/>
                   <a:cs typeface="Helvetica"/>
                 </a:rPr>
-                <a:t>Discrep &gt;= +25 vs &lt;+25: subHR = 14.71 (95% CI 1.18-182.92), p = 0.037</a:t>
+                <a:t>Discrep &gt;= +25 vs &lt;+25: subHR = 14.54 (95% CI 1.23-172.41), p = 0.034</a:t>
               </a:r>
             </a:p>
           </p:txBody>
